--- a/morning-registration-activities/mystery-fact-of-the-day/downloads/Mystery_Fact_of_the_Day.pptx
+++ b/morning-registration-activities/mystery-fact-of-the-day/downloads/Mystery_Fact_of_the_Day.pptx
@@ -2217,7 +2217,7 @@
                 <a:ea typeface="Karla" pitchFamily="34" charset="-122"/>
                 <a:cs typeface="Karla" pitchFamily="34" charset="-120"/>
               </a:rPr>
-              <a:t>Any of the ten fact slides, read the fact aloud, no hints.</a:t>
+              <a:t>Any of the ten fact slides. Read the fact aloud, no hints.</a:t>
             </a:r>
             <a:endParaRPr lang="en-US" sz="1150" dirty="0"/>
           </a:p>
@@ -4156,7 +4156,7 @@
                 <a:ea typeface="Karla" pitchFamily="34" charset="-122"/>
                 <a:cs typeface="Karla" pitchFamily="34" charset="-120"/>
               </a:rPr>
-              <a:t>A book, a documentary, or a trusted website, something that sounds too strange to be true.</a:t>
+              <a:t>Something that sounds too strange to be true, from a book, a documentary or a trusted website.</a:t>
             </a:r>
             <a:endParaRPr lang="en-US" sz="1150" dirty="0"/>
           </a:p>
@@ -7457,7 +7457,7 @@
                 <a:ea typeface="Karla" pitchFamily="34" charset="-122"/>
                 <a:cs typeface="Karla" pitchFamily="34" charset="-120"/>
               </a:rPr>
-              <a:t>At around 5’ 7", he was roughly average height for a Frenchman of his time; the myth came from old measurement mix-ups.</a:t>
+              <a:t>At around 1.70m (5 ft 7 in), he was roughly average height for a Frenchman of his time; the myth came from old measurement mix-ups.</a:t>
             </a:r>
             <a:endParaRPr lang="en-US" sz="1650" dirty="0"/>
           </a:p>

--- a/morning-registration-activities/mystery-fact-of-the-day/downloads/Mystery_Fact_of_the_Day.pptx
+++ b/morning-registration-activities/mystery-fact-of-the-day/downloads/Mystery_Fact_of_the_Day.pptx
@@ -1900,9 +1900,9 @@
                 <a:solidFill>
                   <a:srgbClr val="A7B17F"/>
                 </a:solidFill>
-                <a:latin typeface="Karla" pitchFamily="34" charset="0"/>
-                <a:ea typeface="Karla" pitchFamily="34" charset="-122"/>
-                <a:cs typeface="Karla" pitchFamily="34" charset="-120"/>
+                <a:latin typeface="Calibri" pitchFamily="34" charset="0"/>
+                <a:ea typeface="Calibri" pitchFamily="34" charset="-122"/>
+                <a:cs typeface="Calibri" pitchFamily="34" charset="-120"/>
               </a:rPr>
               <a:t>MORNING REGISTRATION ACTIVITIES</a:t>
             </a:r>
@@ -1935,13 +1935,13 @@
               <a:buNone/>
             </a:pPr>
             <a:r>
-              <a:rPr lang="en-US" sz="4400" b="1" dirty="0">
+              <a:rPr lang="en-US" sz="4400" b="0" dirty="0">
                 <a:solidFill>
                   <a:srgbClr val="80994F"/>
                 </a:solidFill>
-                <a:latin typeface="Libre Caslon Display" pitchFamily="34" charset="0"/>
-                <a:ea typeface="Libre Caslon Display" pitchFamily="34" charset="-122"/>
-                <a:cs typeface="Libre Caslon Display" pitchFamily="34" charset="-120"/>
+                <a:latin typeface="Georgia" pitchFamily="34" charset="0"/>
+                <a:ea typeface="Georgia" pitchFamily="34" charset="-122"/>
+                <a:cs typeface="Georgia" pitchFamily="34" charset="-120"/>
               </a:rPr>
               <a:t>Mystery Fact of the Day</a:t>
             </a:r>
@@ -1978,9 +1978,9 @@
                 <a:solidFill>
                   <a:srgbClr val="919E74"/>
                 </a:solidFill>
-                <a:latin typeface="Karla" pitchFamily="34" charset="0"/>
-                <a:ea typeface="Karla" pitchFamily="34" charset="-122"/>
-                <a:cs typeface="Karla" pitchFamily="34" charset="-120"/>
+                <a:latin typeface="Calibri" pitchFamily="34" charset="0"/>
+                <a:ea typeface="Calibri" pitchFamily="34" charset="-122"/>
+                <a:cs typeface="Calibri" pitchFamily="34" charset="-120"/>
               </a:rPr>
               <a:t>Ten strange-but-true (or strange-but-false) facts, ready to go. The class votes, then finds out.</a:t>
             </a:r>
@@ -2132,9 +2132,9 @@
                 <a:solidFill>
                   <a:srgbClr val="FFFDF7"/>
                 </a:solidFill>
-                <a:latin typeface="Karla" pitchFamily="34" charset="0"/>
-                <a:ea typeface="Karla" pitchFamily="34" charset="-122"/>
-                <a:cs typeface="Karla" pitchFamily="34" charset="-120"/>
+                <a:latin typeface="Calibri" pitchFamily="34" charset="0"/>
+                <a:ea typeface="Calibri" pitchFamily="34" charset="-122"/>
+                <a:cs typeface="Calibri" pitchFamily="34" charset="-120"/>
               </a:rPr>
               <a:t>1</a:t>
             </a:r>
@@ -2171,9 +2171,9 @@
                 <a:solidFill>
                   <a:srgbClr val="80994F"/>
                 </a:solidFill>
-                <a:latin typeface="Karla" pitchFamily="34" charset="0"/>
-                <a:ea typeface="Karla" pitchFamily="34" charset="-122"/>
-                <a:cs typeface="Karla" pitchFamily="34" charset="-120"/>
+                <a:latin typeface="Calibri" pitchFamily="34" charset="0"/>
+                <a:ea typeface="Calibri" pitchFamily="34" charset="-122"/>
+                <a:cs typeface="Calibri" pitchFamily="34" charset="-120"/>
               </a:rPr>
               <a:t>Pick a slide</a:t>
             </a:r>
@@ -2213,9 +2213,9 @@
                 <a:solidFill>
                   <a:srgbClr val="919E74"/>
                 </a:solidFill>
-                <a:latin typeface="Karla" pitchFamily="34" charset="0"/>
-                <a:ea typeface="Karla" pitchFamily="34" charset="-122"/>
-                <a:cs typeface="Karla" pitchFamily="34" charset="-120"/>
+                <a:latin typeface="Calibri" pitchFamily="34" charset="0"/>
+                <a:ea typeface="Calibri" pitchFamily="34" charset="-122"/>
+                <a:cs typeface="Calibri" pitchFamily="34" charset="-120"/>
               </a:rPr>
               <a:t>Any of the ten fact slides. Read the fact aloud, no hints.</a:t>
             </a:r>
@@ -2367,9 +2367,9 @@
                 <a:solidFill>
                   <a:srgbClr val="FFFDF7"/>
                 </a:solidFill>
-                <a:latin typeface="Karla" pitchFamily="34" charset="0"/>
-                <a:ea typeface="Karla" pitchFamily="34" charset="-122"/>
-                <a:cs typeface="Karla" pitchFamily="34" charset="-120"/>
+                <a:latin typeface="Calibri" pitchFamily="34" charset="0"/>
+                <a:ea typeface="Calibri" pitchFamily="34" charset="-122"/>
+                <a:cs typeface="Calibri" pitchFamily="34" charset="-120"/>
               </a:rPr>
               <a:t>2</a:t>
             </a:r>
@@ -2406,9 +2406,9 @@
                 <a:solidFill>
                   <a:srgbClr val="80994F"/>
                 </a:solidFill>
-                <a:latin typeface="Karla" pitchFamily="34" charset="0"/>
-                <a:ea typeface="Karla" pitchFamily="34" charset="-122"/>
-                <a:cs typeface="Karla" pitchFamily="34" charset="-120"/>
+                <a:latin typeface="Calibri" pitchFamily="34" charset="0"/>
+                <a:ea typeface="Calibri" pitchFamily="34" charset="-122"/>
+                <a:cs typeface="Calibri" pitchFamily="34" charset="-120"/>
               </a:rPr>
               <a:t>Take a vote</a:t>
             </a:r>
@@ -2448,9 +2448,9 @@
                 <a:solidFill>
                   <a:srgbClr val="919E74"/>
                 </a:solidFill>
-                <a:latin typeface="Karla" pitchFamily="34" charset="0"/>
-                <a:ea typeface="Karla" pitchFamily="34" charset="-122"/>
-                <a:cs typeface="Karla" pitchFamily="34" charset="-120"/>
+                <a:latin typeface="Calibri" pitchFamily="34" charset="0"/>
+                <a:ea typeface="Calibri" pitchFamily="34" charset="-122"/>
+                <a:cs typeface="Calibri" pitchFamily="34" charset="-120"/>
               </a:rPr>
               <a:t>True or false? A quick show of hands is all it takes.</a:t>
             </a:r>
@@ -2602,9 +2602,9 @@
                 <a:solidFill>
                   <a:srgbClr val="FFFDF7"/>
                 </a:solidFill>
-                <a:latin typeface="Karla" pitchFamily="34" charset="0"/>
-                <a:ea typeface="Karla" pitchFamily="34" charset="-122"/>
-                <a:cs typeface="Karla" pitchFamily="34" charset="-120"/>
+                <a:latin typeface="Calibri" pitchFamily="34" charset="0"/>
+                <a:ea typeface="Calibri" pitchFamily="34" charset="-122"/>
+                <a:cs typeface="Calibri" pitchFamily="34" charset="-120"/>
               </a:rPr>
               <a:t>3</a:t>
             </a:r>
@@ -2641,9 +2641,9 @@
                 <a:solidFill>
                   <a:srgbClr val="80994F"/>
                 </a:solidFill>
-                <a:latin typeface="Karla" pitchFamily="34" charset="0"/>
-                <a:ea typeface="Karla" pitchFamily="34" charset="-122"/>
-                <a:cs typeface="Karla" pitchFamily="34" charset="-120"/>
+                <a:latin typeface="Calibri" pitchFamily="34" charset="0"/>
+                <a:ea typeface="Calibri" pitchFamily="34" charset="-122"/>
+                <a:cs typeface="Calibri" pitchFamily="34" charset="-120"/>
               </a:rPr>
               <a:t>Click to reveal</a:t>
             </a:r>
@@ -2683,9 +2683,9 @@
                 <a:solidFill>
                   <a:srgbClr val="919E74"/>
                 </a:solidFill>
-                <a:latin typeface="Karla" pitchFamily="34" charset="0"/>
-                <a:ea typeface="Karla" pitchFamily="34" charset="-122"/>
-                <a:cs typeface="Karla" pitchFamily="34" charset="-120"/>
+                <a:latin typeface="Calibri" pitchFamily="34" charset="0"/>
+                <a:ea typeface="Calibri" pitchFamily="34" charset="-122"/>
+                <a:cs typeface="Calibri" pitchFamily="34" charset="-120"/>
               </a:rPr>
               <a:t>The answer and the “why” appear with a click, when you’re ready.</a:t>
             </a:r>
@@ -2722,9 +2722,9 @@
                 <a:solidFill>
                   <a:srgbClr val="8B9179"/>
                 </a:solidFill>
-                <a:latin typeface="Karla" pitchFamily="34" charset="0"/>
-                <a:ea typeface="Karla" pitchFamily="34" charset="-122"/>
-                <a:cs typeface="Karla" pitchFamily="34" charset="-120"/>
+                <a:latin typeface="Calibri" pitchFamily="34" charset="0"/>
+                <a:ea typeface="Calibri" pitchFamily="34" charset="-122"/>
+                <a:cs typeface="Calibri" pitchFamily="34" charset="-120"/>
               </a:rPr>
               <a:t>Needs: nothing to prepare. Ten facts are already loaded into this deck, with ten more in the resource pack.</a:t>
             </a:r>
@@ -2785,9 +2785,9 @@
                 <a:solidFill>
                   <a:srgbClr val="8B9179"/>
                 </a:solidFill>
-                <a:latin typeface="Libre Caslon Display" pitchFamily="34" charset="0"/>
-                <a:ea typeface="Libre Caslon Display" pitchFamily="34" charset="-122"/>
-                <a:cs typeface="Libre Caslon Display" pitchFamily="34" charset="-120"/>
+                <a:latin typeface="Georgia" pitchFamily="34" charset="0"/>
+                <a:ea typeface="Georgia" pitchFamily="34" charset="-122"/>
+                <a:cs typeface="Georgia" pitchFamily="34" charset="-120"/>
               </a:rPr>
               <a:t>The Pastoral Guide</a:t>
             </a:r>
@@ -2873,9 +2873,9 @@
                 <a:solidFill>
                   <a:srgbClr val="A7B17F"/>
                 </a:solidFill>
-                <a:latin typeface="Karla" pitchFamily="34" charset="0"/>
-                <a:ea typeface="Karla" pitchFamily="34" charset="-122"/>
-                <a:cs typeface="Karla" pitchFamily="34" charset="-120"/>
+                <a:latin typeface="Calibri" pitchFamily="34" charset="0"/>
+                <a:ea typeface="Calibri" pitchFamily="34" charset="-122"/>
+                <a:cs typeface="Calibri" pitchFamily="34" charset="-120"/>
               </a:rPr>
               <a:t>MYSTERY FACT OF THE DAY  ·  NO. 9</a:t>
             </a:r>
@@ -2953,9 +2953,9 @@
                 <a:solidFill>
                   <a:srgbClr val="80994F"/>
                 </a:solidFill>
-                <a:latin typeface="Libre Caslon Display" pitchFamily="34" charset="0"/>
-                <a:ea typeface="Libre Caslon Display" pitchFamily="34" charset="-122"/>
-                <a:cs typeface="Libre Caslon Display" pitchFamily="34" charset="-120"/>
+                <a:latin typeface="Georgia" pitchFamily="34" charset="0"/>
+                <a:ea typeface="Georgia" pitchFamily="34" charset="-122"/>
+                <a:cs typeface="Georgia" pitchFamily="34" charset="-120"/>
               </a:rPr>
               <a:t>The unicorn is the national animal of Scotland.</a:t>
             </a:r>
@@ -2992,9 +2992,9 @@
                 <a:solidFill>
                   <a:srgbClr val="919E74"/>
                 </a:solidFill>
-                <a:latin typeface="Karla" pitchFamily="34" charset="0"/>
-                <a:ea typeface="Karla" pitchFamily="34" charset="-122"/>
-                <a:cs typeface="Karla" pitchFamily="34" charset="-120"/>
+                <a:latin typeface="Calibri" pitchFamily="34" charset="0"/>
+                <a:ea typeface="Calibri" pitchFamily="34" charset="-122"/>
+                <a:cs typeface="Calibri" pitchFamily="34" charset="-120"/>
               </a:rPr>
               <a:t>True or false? Show of hands.</a:t>
             </a:r>
@@ -3057,9 +3057,9 @@
                 <a:solidFill>
                   <a:srgbClr val="FFFDF7"/>
                 </a:solidFill>
-                <a:latin typeface="Karla" pitchFamily="34" charset="0"/>
-                <a:ea typeface="Karla" pitchFamily="34" charset="-122"/>
-                <a:cs typeface="Karla" pitchFamily="34" charset="-120"/>
+                <a:latin typeface="Calibri" pitchFamily="34" charset="0"/>
+                <a:ea typeface="Calibri" pitchFamily="34" charset="-122"/>
+                <a:cs typeface="Calibri" pitchFamily="34" charset="-120"/>
               </a:rPr>
               <a:t>TRUE</a:t>
             </a:r>
@@ -3099,9 +3099,9 @@
                 <a:solidFill>
                   <a:srgbClr val="80994F"/>
                 </a:solidFill>
-                <a:latin typeface="Karla" pitchFamily="34" charset="0"/>
-                <a:ea typeface="Karla" pitchFamily="34" charset="-122"/>
-                <a:cs typeface="Karla" pitchFamily="34" charset="-120"/>
+                <a:latin typeface="Calibri" pitchFamily="34" charset="0"/>
+                <a:ea typeface="Calibri" pitchFamily="34" charset="-122"/>
+                <a:cs typeface="Calibri" pitchFamily="34" charset="-120"/>
               </a:rPr>
               <a:t>It’s been used on the Scottish royal coat of arms since the 1300s.</a:t>
             </a:r>
@@ -3162,9 +3162,9 @@
                 <a:solidFill>
                   <a:srgbClr val="8B9179"/>
                 </a:solidFill>
-                <a:latin typeface="Libre Caslon Display" pitchFamily="34" charset="0"/>
-                <a:ea typeface="Libre Caslon Display" pitchFamily="34" charset="-122"/>
-                <a:cs typeface="Libre Caslon Display" pitchFamily="34" charset="-120"/>
+                <a:latin typeface="Georgia" pitchFamily="34" charset="0"/>
+                <a:ea typeface="Georgia" pitchFamily="34" charset="-122"/>
+                <a:cs typeface="Georgia" pitchFamily="34" charset="-120"/>
               </a:rPr>
               <a:t>The Pastoral Guide</a:t>
             </a:r>
@@ -3356,9 +3356,9 @@
                 <a:solidFill>
                   <a:srgbClr val="A7B17F"/>
                 </a:solidFill>
-                <a:latin typeface="Karla" pitchFamily="34" charset="0"/>
-                <a:ea typeface="Karla" pitchFamily="34" charset="-122"/>
-                <a:cs typeface="Karla" pitchFamily="34" charset="-120"/>
+                <a:latin typeface="Calibri" pitchFamily="34" charset="0"/>
+                <a:ea typeface="Calibri" pitchFamily="34" charset="-122"/>
+                <a:cs typeface="Calibri" pitchFamily="34" charset="-120"/>
               </a:rPr>
               <a:t>MYSTERY FACT OF THE DAY  ·  NO. 10</a:t>
             </a:r>
@@ -3436,9 +3436,9 @@
                 <a:solidFill>
                   <a:srgbClr val="80994F"/>
                 </a:solidFill>
-                <a:latin typeface="Libre Caslon Display" pitchFamily="34" charset="0"/>
-                <a:ea typeface="Libre Caslon Display" pitchFamily="34" charset="-122"/>
-                <a:cs typeface="Libre Caslon Display" pitchFamily="34" charset="-120"/>
+                <a:latin typeface="Georgia" pitchFamily="34" charset="0"/>
+                <a:ea typeface="Georgia" pitchFamily="34" charset="-122"/>
+                <a:cs typeface="Georgia" pitchFamily="34" charset="-120"/>
               </a:rPr>
               <a:t>Lightning never strikes the same place twice.</a:t>
             </a:r>
@@ -3475,9 +3475,9 @@
                 <a:solidFill>
                   <a:srgbClr val="919E74"/>
                 </a:solidFill>
-                <a:latin typeface="Karla" pitchFamily="34" charset="0"/>
-                <a:ea typeface="Karla" pitchFamily="34" charset="-122"/>
-                <a:cs typeface="Karla" pitchFamily="34" charset="-120"/>
+                <a:latin typeface="Calibri" pitchFamily="34" charset="0"/>
+                <a:ea typeface="Calibri" pitchFamily="34" charset="-122"/>
+                <a:cs typeface="Calibri" pitchFamily="34" charset="-120"/>
               </a:rPr>
               <a:t>True or false? Show of hands.</a:t>
             </a:r>
@@ -3540,9 +3540,9 @@
                 <a:solidFill>
                   <a:srgbClr val="FFFDF7"/>
                 </a:solidFill>
-                <a:latin typeface="Karla" pitchFamily="34" charset="0"/>
-                <a:ea typeface="Karla" pitchFamily="34" charset="-122"/>
-                <a:cs typeface="Karla" pitchFamily="34" charset="-120"/>
+                <a:latin typeface="Calibri" pitchFamily="34" charset="0"/>
+                <a:ea typeface="Calibri" pitchFamily="34" charset="-122"/>
+                <a:cs typeface="Calibri" pitchFamily="34" charset="-120"/>
               </a:rPr>
               <a:t>FALSE</a:t>
             </a:r>
@@ -3582,9 +3582,9 @@
                 <a:solidFill>
                   <a:srgbClr val="80994F"/>
                 </a:solidFill>
-                <a:latin typeface="Karla" pitchFamily="34" charset="0"/>
-                <a:ea typeface="Karla" pitchFamily="34" charset="-122"/>
-                <a:cs typeface="Karla" pitchFamily="34" charset="-120"/>
+                <a:latin typeface="Calibri" pitchFamily="34" charset="0"/>
+                <a:ea typeface="Calibri" pitchFamily="34" charset="-122"/>
+                <a:cs typeface="Calibri" pitchFamily="34" charset="-120"/>
               </a:rPr>
               <a:t>It absolutely can. New York’s Empire State Building is struck by lightning about 20 to 25 times a year.</a:t>
             </a:r>
@@ -3645,9 +3645,9 @@
                 <a:solidFill>
                   <a:srgbClr val="8B9179"/>
                 </a:solidFill>
-                <a:latin typeface="Libre Caslon Display" pitchFamily="34" charset="0"/>
-                <a:ea typeface="Libre Caslon Display" pitchFamily="34" charset="-122"/>
-                <a:cs typeface="Libre Caslon Display" pitchFamily="34" charset="-120"/>
+                <a:latin typeface="Georgia" pitchFamily="34" charset="0"/>
+                <a:ea typeface="Georgia" pitchFamily="34" charset="-122"/>
+                <a:cs typeface="Georgia" pitchFamily="34" charset="-120"/>
               </a:rPr>
               <a:t>The Pastoral Guide</a:t>
             </a:r>
@@ -3839,9 +3839,9 @@
                 <a:solidFill>
                   <a:srgbClr val="A7B17F"/>
                 </a:solidFill>
-                <a:latin typeface="Karla" pitchFamily="34" charset="0"/>
-                <a:ea typeface="Karla" pitchFamily="34" charset="-122"/>
-                <a:cs typeface="Karla" pitchFamily="34" charset="-120"/>
+                <a:latin typeface="Calibri" pitchFamily="34" charset="0"/>
+                <a:ea typeface="Calibri" pitchFamily="34" charset="-122"/>
+                <a:cs typeface="Calibri" pitchFamily="34" charset="-120"/>
               </a:rPr>
               <a:t>MORNING REGISTRATION ACTIVITIES</a:t>
             </a:r>
@@ -3874,13 +3874,13 @@
               <a:buNone/>
             </a:pPr>
             <a:r>
-              <a:rPr lang="en-US" sz="4400" b="1" dirty="0">
+              <a:rPr lang="en-US" sz="4400" b="0" dirty="0">
                 <a:solidFill>
                   <a:srgbClr val="80994F"/>
                 </a:solidFill>
-                <a:latin typeface="Libre Caslon Display" pitchFamily="34" charset="0"/>
-                <a:ea typeface="Libre Caslon Display" pitchFamily="34" charset="-122"/>
-                <a:cs typeface="Libre Caslon Display" pitchFamily="34" charset="-120"/>
+                <a:latin typeface="Georgia" pitchFamily="34" charset="0"/>
+                <a:ea typeface="Georgia" pitchFamily="34" charset="-122"/>
+                <a:cs typeface="Georgia" pitchFamily="34" charset="-120"/>
               </a:rPr>
               <a:t>Now You Try</a:t>
             </a:r>
@@ -3917,9 +3917,9 @@
                 <a:solidFill>
                   <a:srgbClr val="919E74"/>
                 </a:solidFill>
-                <a:latin typeface="Karla" pitchFamily="34" charset="0"/>
-                <a:ea typeface="Karla" pitchFamily="34" charset="-122"/>
-                <a:cs typeface="Karla" pitchFamily="34" charset="-120"/>
+                <a:latin typeface="Calibri" pitchFamily="34" charset="0"/>
+                <a:ea typeface="Calibri" pitchFamily="34" charset="-122"/>
+                <a:cs typeface="Calibri" pitchFamily="34" charset="-120"/>
               </a:rPr>
               <a:t>Find your own mystery fact for next time. You could be the one running the reveal.</a:t>
             </a:r>
@@ -4071,9 +4071,9 @@
                 <a:solidFill>
                   <a:srgbClr val="FFFDF7"/>
                 </a:solidFill>
-                <a:latin typeface="Karla" pitchFamily="34" charset="0"/>
-                <a:ea typeface="Karla" pitchFamily="34" charset="-122"/>
-                <a:cs typeface="Karla" pitchFamily="34" charset="-120"/>
+                <a:latin typeface="Calibri" pitchFamily="34" charset="0"/>
+                <a:ea typeface="Calibri" pitchFamily="34" charset="-122"/>
+                <a:cs typeface="Calibri" pitchFamily="34" charset="-120"/>
               </a:rPr>
               <a:t>1</a:t>
             </a:r>
@@ -4110,9 +4110,9 @@
                 <a:solidFill>
                   <a:srgbClr val="80994F"/>
                 </a:solidFill>
-                <a:latin typeface="Karla" pitchFamily="34" charset="0"/>
-                <a:ea typeface="Karla" pitchFamily="34" charset="-122"/>
-                <a:cs typeface="Karla" pitchFamily="34" charset="-120"/>
+                <a:latin typeface="Calibri" pitchFamily="34" charset="0"/>
+                <a:ea typeface="Calibri" pitchFamily="34" charset="-122"/>
+                <a:cs typeface="Calibri" pitchFamily="34" charset="-120"/>
               </a:rPr>
               <a:t>Find one</a:t>
             </a:r>
@@ -4152,9 +4152,9 @@
                 <a:solidFill>
                   <a:srgbClr val="919E74"/>
                 </a:solidFill>
-                <a:latin typeface="Karla" pitchFamily="34" charset="0"/>
-                <a:ea typeface="Karla" pitchFamily="34" charset="-122"/>
-                <a:cs typeface="Karla" pitchFamily="34" charset="-120"/>
+                <a:latin typeface="Calibri" pitchFamily="34" charset="0"/>
+                <a:ea typeface="Calibri" pitchFamily="34" charset="-122"/>
+                <a:cs typeface="Calibri" pitchFamily="34" charset="-120"/>
               </a:rPr>
               <a:t>Something that sounds too strange to be true, from a book, a documentary or a trusted website.</a:t>
             </a:r>
@@ -4306,9 +4306,9 @@
                 <a:solidFill>
                   <a:srgbClr val="FFFDF7"/>
                 </a:solidFill>
-                <a:latin typeface="Karla" pitchFamily="34" charset="0"/>
-                <a:ea typeface="Karla" pitchFamily="34" charset="-122"/>
-                <a:cs typeface="Karla" pitchFamily="34" charset="-120"/>
+                <a:latin typeface="Calibri" pitchFamily="34" charset="0"/>
+                <a:ea typeface="Calibri" pitchFamily="34" charset="-122"/>
+                <a:cs typeface="Calibri" pitchFamily="34" charset="-120"/>
               </a:rPr>
               <a:t>2</a:t>
             </a:r>
@@ -4345,9 +4345,9 @@
                 <a:solidFill>
                   <a:srgbClr val="80994F"/>
                 </a:solidFill>
-                <a:latin typeface="Karla" pitchFamily="34" charset="0"/>
-                <a:ea typeface="Karla" pitchFamily="34" charset="-122"/>
-                <a:cs typeface="Karla" pitchFamily="34" charset="-120"/>
+                <a:latin typeface="Calibri" pitchFamily="34" charset="0"/>
+                <a:ea typeface="Calibri" pitchFamily="34" charset="-122"/>
+                <a:cs typeface="Calibri" pitchFamily="34" charset="-120"/>
               </a:rPr>
               <a:t>Check it</a:t>
             </a:r>
@@ -4387,9 +4387,9 @@
                 <a:solidFill>
                   <a:srgbClr val="919E74"/>
                 </a:solidFill>
-                <a:latin typeface="Karla" pitchFamily="34" charset="0"/>
-                <a:ea typeface="Karla" pitchFamily="34" charset="-122"/>
-                <a:cs typeface="Karla" pitchFamily="34" charset="-120"/>
+                <a:latin typeface="Calibri" pitchFamily="34" charset="0"/>
+                <a:ea typeface="Calibri" pitchFamily="34" charset="-122"/>
+                <a:cs typeface="Calibri" pitchFamily="34" charset="-120"/>
               </a:rPr>
               <a:t>Make sure it’s actually correct before you bring it in.</a:t>
             </a:r>
@@ -4541,9 +4541,9 @@
                 <a:solidFill>
                   <a:srgbClr val="FFFDF7"/>
                 </a:solidFill>
-                <a:latin typeface="Karla" pitchFamily="34" charset="0"/>
-                <a:ea typeface="Karla" pitchFamily="34" charset="-122"/>
-                <a:cs typeface="Karla" pitchFamily="34" charset="-120"/>
+                <a:latin typeface="Calibri" pitchFamily="34" charset="0"/>
+                <a:ea typeface="Calibri" pitchFamily="34" charset="-122"/>
+                <a:cs typeface="Calibri" pitchFamily="34" charset="-120"/>
               </a:rPr>
               <a:t>3</a:t>
             </a:r>
@@ -4580,9 +4580,9 @@
                 <a:solidFill>
                   <a:srgbClr val="80994F"/>
                 </a:solidFill>
-                <a:latin typeface="Karla" pitchFamily="34" charset="0"/>
-                <a:ea typeface="Karla" pitchFamily="34" charset="-122"/>
-                <a:cs typeface="Karla" pitchFamily="34" charset="-120"/>
+                <a:latin typeface="Calibri" pitchFamily="34" charset="0"/>
+                <a:ea typeface="Calibri" pitchFamily="34" charset="-122"/>
+                <a:cs typeface="Calibri" pitchFamily="34" charset="-120"/>
               </a:rPr>
               <a:t>Share it</a:t>
             </a:r>
@@ -4622,9 +4622,9 @@
                 <a:solidFill>
                   <a:srgbClr val="919E74"/>
                 </a:solidFill>
-                <a:latin typeface="Karla" pitchFamily="34" charset="0"/>
-                <a:ea typeface="Karla" pitchFamily="34" charset="-122"/>
-                <a:cs typeface="Karla" pitchFamily="34" charset="-120"/>
+                <a:latin typeface="Calibri" pitchFamily="34" charset="0"/>
+                <a:ea typeface="Calibri" pitchFamily="34" charset="-122"/>
+                <a:cs typeface="Calibri" pitchFamily="34" charset="-120"/>
               </a:rPr>
               <a:t>Read it out as a true-or-false statement, then reveal the answer yourself.</a:t>
             </a:r>
@@ -4661,9 +4661,9 @@
                 <a:solidFill>
                   <a:srgbClr val="8B9179"/>
                 </a:solidFill>
-                <a:latin typeface="Karla" pitchFamily="34" charset="0"/>
-                <a:ea typeface="Karla" pitchFamily="34" charset="-122"/>
-                <a:cs typeface="Karla" pitchFamily="34" charset="-120"/>
+                <a:latin typeface="Calibri" pitchFamily="34" charset="0"/>
+                <a:ea typeface="Calibri" pitchFamily="34" charset="-122"/>
+                <a:cs typeface="Calibri" pitchFamily="34" charset="-120"/>
               </a:rPr>
               <a:t>Bring it next time. The best ones stump the whole class.</a:t>
             </a:r>
@@ -4724,9 +4724,9 @@
                 <a:solidFill>
                   <a:srgbClr val="8B9179"/>
                 </a:solidFill>
-                <a:latin typeface="Libre Caslon Display" pitchFamily="34" charset="0"/>
-                <a:ea typeface="Libre Caslon Display" pitchFamily="34" charset="-122"/>
-                <a:cs typeface="Libre Caslon Display" pitchFamily="34" charset="-120"/>
+                <a:latin typeface="Georgia" pitchFamily="34" charset="0"/>
+                <a:ea typeface="Georgia" pitchFamily="34" charset="-122"/>
+                <a:cs typeface="Georgia" pitchFamily="34" charset="-120"/>
               </a:rPr>
               <a:t>The Pastoral Guide</a:t>
             </a:r>
@@ -4812,9 +4812,9 @@
                 <a:solidFill>
                   <a:srgbClr val="A7B17F"/>
                 </a:solidFill>
-                <a:latin typeface="Karla" pitchFamily="34" charset="0"/>
-                <a:ea typeface="Karla" pitchFamily="34" charset="-122"/>
-                <a:cs typeface="Karla" pitchFamily="34" charset="-120"/>
+                <a:latin typeface="Calibri" pitchFamily="34" charset="0"/>
+                <a:ea typeface="Calibri" pitchFamily="34" charset="-122"/>
+                <a:cs typeface="Calibri" pitchFamily="34" charset="-120"/>
               </a:rPr>
               <a:t>MYSTERY FACT OF THE DAY  ·  NO. 1</a:t>
             </a:r>
@@ -4892,9 +4892,9 @@
                 <a:solidFill>
                   <a:srgbClr val="80994F"/>
                 </a:solidFill>
-                <a:latin typeface="Libre Caslon Display" pitchFamily="34" charset="0"/>
-                <a:ea typeface="Libre Caslon Display" pitchFamily="34" charset="-122"/>
-                <a:cs typeface="Libre Caslon Display" pitchFamily="34" charset="-120"/>
+                <a:latin typeface="Georgia" pitchFamily="34" charset="0"/>
+                <a:ea typeface="Georgia" pitchFamily="34" charset="-122"/>
+                <a:cs typeface="Georgia" pitchFamily="34" charset="-120"/>
               </a:rPr>
               <a:t>Honey never goes off. A jar of it can still be good to eat after thousands of years.</a:t>
             </a:r>
@@ -4931,9 +4931,9 @@
                 <a:solidFill>
                   <a:srgbClr val="919E74"/>
                 </a:solidFill>
-                <a:latin typeface="Karla" pitchFamily="34" charset="0"/>
-                <a:ea typeface="Karla" pitchFamily="34" charset="-122"/>
-                <a:cs typeface="Karla" pitchFamily="34" charset="-120"/>
+                <a:latin typeface="Calibri" pitchFamily="34" charset="0"/>
+                <a:ea typeface="Calibri" pitchFamily="34" charset="-122"/>
+                <a:cs typeface="Calibri" pitchFamily="34" charset="-120"/>
               </a:rPr>
               <a:t>True or false? Show of hands.</a:t>
             </a:r>
@@ -4996,9 +4996,9 @@
                 <a:solidFill>
                   <a:srgbClr val="FFFDF7"/>
                 </a:solidFill>
-                <a:latin typeface="Karla" pitchFamily="34" charset="0"/>
-                <a:ea typeface="Karla" pitchFamily="34" charset="-122"/>
-                <a:cs typeface="Karla" pitchFamily="34" charset="-120"/>
+                <a:latin typeface="Calibri" pitchFamily="34" charset="0"/>
+                <a:ea typeface="Calibri" pitchFamily="34" charset="-122"/>
+                <a:cs typeface="Calibri" pitchFamily="34" charset="-120"/>
               </a:rPr>
               <a:t>TRUE</a:t>
             </a:r>
@@ -5038,9 +5038,9 @@
                 <a:solidFill>
                   <a:srgbClr val="80994F"/>
                 </a:solidFill>
-                <a:latin typeface="Karla" pitchFamily="34" charset="0"/>
-                <a:ea typeface="Karla" pitchFamily="34" charset="-122"/>
-                <a:cs typeface="Karla" pitchFamily="34" charset="-120"/>
+                <a:latin typeface="Calibri" pitchFamily="34" charset="0"/>
+                <a:ea typeface="Calibri" pitchFamily="34" charset="-122"/>
+                <a:cs typeface="Calibri" pitchFamily="34" charset="-120"/>
               </a:rPr>
               <a:t>Archaeologists have found 3,000-year-old honey in Egyptian tombs that was still perfectly good to eat.</a:t>
             </a:r>
@@ -5101,9 +5101,9 @@
                 <a:solidFill>
                   <a:srgbClr val="8B9179"/>
                 </a:solidFill>
-                <a:latin typeface="Libre Caslon Display" pitchFamily="34" charset="0"/>
-                <a:ea typeface="Libre Caslon Display" pitchFamily="34" charset="-122"/>
-                <a:cs typeface="Libre Caslon Display" pitchFamily="34" charset="-120"/>
+                <a:latin typeface="Georgia" pitchFamily="34" charset="0"/>
+                <a:ea typeface="Georgia" pitchFamily="34" charset="-122"/>
+                <a:cs typeface="Georgia" pitchFamily="34" charset="-120"/>
               </a:rPr>
               <a:t>The Pastoral Guide</a:t>
             </a:r>
@@ -5295,9 +5295,9 @@
                 <a:solidFill>
                   <a:srgbClr val="A7B17F"/>
                 </a:solidFill>
-                <a:latin typeface="Karla" pitchFamily="34" charset="0"/>
-                <a:ea typeface="Karla" pitchFamily="34" charset="-122"/>
-                <a:cs typeface="Karla" pitchFamily="34" charset="-120"/>
+                <a:latin typeface="Calibri" pitchFamily="34" charset="0"/>
+                <a:ea typeface="Calibri" pitchFamily="34" charset="-122"/>
+                <a:cs typeface="Calibri" pitchFamily="34" charset="-120"/>
               </a:rPr>
               <a:t>MYSTERY FACT OF THE DAY  ·  NO. 2</a:t>
             </a:r>
@@ -5375,9 +5375,9 @@
                 <a:solidFill>
                   <a:srgbClr val="80994F"/>
                 </a:solidFill>
-                <a:latin typeface="Libre Caslon Display" pitchFamily="34" charset="0"/>
-                <a:ea typeface="Libre Caslon Display" pitchFamily="34" charset="-122"/>
-                <a:cs typeface="Libre Caslon Display" pitchFamily="34" charset="-120"/>
+                <a:latin typeface="Georgia" pitchFamily="34" charset="0"/>
+                <a:ea typeface="Georgia" pitchFamily="34" charset="-122"/>
+                <a:cs typeface="Georgia" pitchFamily="34" charset="-120"/>
               </a:rPr>
               <a:t>The Great Wall of China can be seen from space with the naked eye.</a:t>
             </a:r>
@@ -5414,9 +5414,9 @@
                 <a:solidFill>
                   <a:srgbClr val="919E74"/>
                 </a:solidFill>
-                <a:latin typeface="Karla" pitchFamily="34" charset="0"/>
-                <a:ea typeface="Karla" pitchFamily="34" charset="-122"/>
-                <a:cs typeface="Karla" pitchFamily="34" charset="-120"/>
+                <a:latin typeface="Calibri" pitchFamily="34" charset="0"/>
+                <a:ea typeface="Calibri" pitchFamily="34" charset="-122"/>
+                <a:cs typeface="Calibri" pitchFamily="34" charset="-120"/>
               </a:rPr>
               <a:t>True or false? Show of hands.</a:t>
             </a:r>
@@ -5479,9 +5479,9 @@
                 <a:solidFill>
                   <a:srgbClr val="FFFDF7"/>
                 </a:solidFill>
-                <a:latin typeface="Karla" pitchFamily="34" charset="0"/>
-                <a:ea typeface="Karla" pitchFamily="34" charset="-122"/>
-                <a:cs typeface="Karla" pitchFamily="34" charset="-120"/>
+                <a:latin typeface="Calibri" pitchFamily="34" charset="0"/>
+                <a:ea typeface="Calibri" pitchFamily="34" charset="-122"/>
+                <a:cs typeface="Calibri" pitchFamily="34" charset="-120"/>
               </a:rPr>
               <a:t>FALSE</a:t>
             </a:r>
@@ -5521,9 +5521,9 @@
                 <a:solidFill>
                   <a:srgbClr val="80994F"/>
                 </a:solidFill>
-                <a:latin typeface="Karla" pitchFamily="34" charset="0"/>
-                <a:ea typeface="Karla" pitchFamily="34" charset="-122"/>
-                <a:cs typeface="Karla" pitchFamily="34" charset="-120"/>
+                <a:latin typeface="Calibri" pitchFamily="34" charset="0"/>
+                <a:ea typeface="Calibri" pitchFamily="34" charset="-122"/>
+                <a:cs typeface="Calibri" pitchFamily="34" charset="-120"/>
               </a:rPr>
               <a:t>Astronauts say it’s actually very hard to spot without help, and most “space photos” of it are zoomed in or edited.</a:t>
             </a:r>
@@ -5584,9 +5584,9 @@
                 <a:solidFill>
                   <a:srgbClr val="8B9179"/>
                 </a:solidFill>
-                <a:latin typeface="Libre Caslon Display" pitchFamily="34" charset="0"/>
-                <a:ea typeface="Libre Caslon Display" pitchFamily="34" charset="-122"/>
-                <a:cs typeface="Libre Caslon Display" pitchFamily="34" charset="-120"/>
+                <a:latin typeface="Georgia" pitchFamily="34" charset="0"/>
+                <a:ea typeface="Georgia" pitchFamily="34" charset="-122"/>
+                <a:cs typeface="Georgia" pitchFamily="34" charset="-120"/>
               </a:rPr>
               <a:t>The Pastoral Guide</a:t>
             </a:r>
@@ -5778,9 +5778,9 @@
                 <a:solidFill>
                   <a:srgbClr val="A7B17F"/>
                 </a:solidFill>
-                <a:latin typeface="Karla" pitchFamily="34" charset="0"/>
-                <a:ea typeface="Karla" pitchFamily="34" charset="-122"/>
-                <a:cs typeface="Karla" pitchFamily="34" charset="-120"/>
+                <a:latin typeface="Calibri" pitchFamily="34" charset="0"/>
+                <a:ea typeface="Calibri" pitchFamily="34" charset="-122"/>
+                <a:cs typeface="Calibri" pitchFamily="34" charset="-120"/>
               </a:rPr>
               <a:t>MYSTERY FACT OF THE DAY  ·  NO. 3</a:t>
             </a:r>
@@ -5858,9 +5858,9 @@
                 <a:solidFill>
                   <a:srgbClr val="80994F"/>
                 </a:solidFill>
-                <a:latin typeface="Libre Caslon Display" pitchFamily="34" charset="0"/>
-                <a:ea typeface="Libre Caslon Display" pitchFamily="34" charset="-122"/>
-                <a:cs typeface="Libre Caslon Display" pitchFamily="34" charset="-120"/>
+                <a:latin typeface="Georgia" pitchFamily="34" charset="0"/>
+                <a:ea typeface="Georgia" pitchFamily="34" charset="-122"/>
+                <a:cs typeface="Georgia" pitchFamily="34" charset="-120"/>
               </a:rPr>
               <a:t>Octopuses have three hearts.</a:t>
             </a:r>
@@ -5897,9 +5897,9 @@
                 <a:solidFill>
                   <a:srgbClr val="919E74"/>
                 </a:solidFill>
-                <a:latin typeface="Karla" pitchFamily="34" charset="0"/>
-                <a:ea typeface="Karla" pitchFamily="34" charset="-122"/>
-                <a:cs typeface="Karla" pitchFamily="34" charset="-120"/>
+                <a:latin typeface="Calibri" pitchFamily="34" charset="0"/>
+                <a:ea typeface="Calibri" pitchFamily="34" charset="-122"/>
+                <a:cs typeface="Calibri" pitchFamily="34" charset="-120"/>
               </a:rPr>
               <a:t>True or false? Show of hands.</a:t>
             </a:r>
@@ -5962,9 +5962,9 @@
                 <a:solidFill>
                   <a:srgbClr val="FFFDF7"/>
                 </a:solidFill>
-                <a:latin typeface="Karla" pitchFamily="34" charset="0"/>
-                <a:ea typeface="Karla" pitchFamily="34" charset="-122"/>
-                <a:cs typeface="Karla" pitchFamily="34" charset="-120"/>
+                <a:latin typeface="Calibri" pitchFamily="34" charset="0"/>
+                <a:ea typeface="Calibri" pitchFamily="34" charset="-122"/>
+                <a:cs typeface="Calibri" pitchFamily="34" charset="-120"/>
               </a:rPr>
               <a:t>TRUE</a:t>
             </a:r>
@@ -6004,9 +6004,9 @@
                 <a:solidFill>
                   <a:srgbClr val="80994F"/>
                 </a:solidFill>
-                <a:latin typeface="Karla" pitchFamily="34" charset="0"/>
-                <a:ea typeface="Karla" pitchFamily="34" charset="-122"/>
-                <a:cs typeface="Karla" pitchFamily="34" charset="-120"/>
+                <a:latin typeface="Calibri" pitchFamily="34" charset="0"/>
+                <a:ea typeface="Calibri" pitchFamily="34" charset="-122"/>
+                <a:cs typeface="Calibri" pitchFamily="34" charset="-120"/>
               </a:rPr>
               <a:t>Two pump blood to the gills, and one pumps it to the rest of the body.</a:t>
             </a:r>
@@ -6067,9 +6067,9 @@
                 <a:solidFill>
                   <a:srgbClr val="8B9179"/>
                 </a:solidFill>
-                <a:latin typeface="Libre Caslon Display" pitchFamily="34" charset="0"/>
-                <a:ea typeface="Libre Caslon Display" pitchFamily="34" charset="-122"/>
-                <a:cs typeface="Libre Caslon Display" pitchFamily="34" charset="-120"/>
+                <a:latin typeface="Georgia" pitchFamily="34" charset="0"/>
+                <a:ea typeface="Georgia" pitchFamily="34" charset="-122"/>
+                <a:cs typeface="Georgia" pitchFamily="34" charset="-120"/>
               </a:rPr>
               <a:t>The Pastoral Guide</a:t>
             </a:r>
@@ -6261,9 +6261,9 @@
                 <a:solidFill>
                   <a:srgbClr val="A7B17F"/>
                 </a:solidFill>
-                <a:latin typeface="Karla" pitchFamily="34" charset="0"/>
-                <a:ea typeface="Karla" pitchFamily="34" charset="-122"/>
-                <a:cs typeface="Karla" pitchFamily="34" charset="-120"/>
+                <a:latin typeface="Calibri" pitchFamily="34" charset="0"/>
+                <a:ea typeface="Calibri" pitchFamily="34" charset="-122"/>
+                <a:cs typeface="Calibri" pitchFamily="34" charset="-120"/>
               </a:rPr>
               <a:t>MYSTERY FACT OF THE DAY  ·  NO. 4</a:t>
             </a:r>
@@ -6341,9 +6341,9 @@
                 <a:solidFill>
                   <a:srgbClr val="80994F"/>
                 </a:solidFill>
-                <a:latin typeface="Libre Caslon Display" pitchFamily="34" charset="0"/>
-                <a:ea typeface="Libre Caslon Display" pitchFamily="34" charset="-122"/>
-                <a:cs typeface="Libre Caslon Display" pitchFamily="34" charset="-120"/>
+                <a:latin typeface="Georgia" pitchFamily="34" charset="0"/>
+                <a:ea typeface="Georgia" pitchFamily="34" charset="-122"/>
+                <a:cs typeface="Georgia" pitchFamily="34" charset="-120"/>
               </a:rPr>
               <a:t>Bulls charge at the colour red.</a:t>
             </a:r>
@@ -6380,9 +6380,9 @@
                 <a:solidFill>
                   <a:srgbClr val="919E74"/>
                 </a:solidFill>
-                <a:latin typeface="Karla" pitchFamily="34" charset="0"/>
-                <a:ea typeface="Karla" pitchFamily="34" charset="-122"/>
-                <a:cs typeface="Karla" pitchFamily="34" charset="-120"/>
+                <a:latin typeface="Calibri" pitchFamily="34" charset="0"/>
+                <a:ea typeface="Calibri" pitchFamily="34" charset="-122"/>
+                <a:cs typeface="Calibri" pitchFamily="34" charset="-120"/>
               </a:rPr>
               <a:t>True or false? Show of hands.</a:t>
             </a:r>
@@ -6445,9 +6445,9 @@
                 <a:solidFill>
                   <a:srgbClr val="FFFDF7"/>
                 </a:solidFill>
-                <a:latin typeface="Karla" pitchFamily="34" charset="0"/>
-                <a:ea typeface="Karla" pitchFamily="34" charset="-122"/>
-                <a:cs typeface="Karla" pitchFamily="34" charset="-120"/>
+                <a:latin typeface="Calibri" pitchFamily="34" charset="0"/>
+                <a:ea typeface="Calibri" pitchFamily="34" charset="-122"/>
+                <a:cs typeface="Calibri" pitchFamily="34" charset="-120"/>
               </a:rPr>
               <a:t>FALSE</a:t>
             </a:r>
@@ -6487,9 +6487,9 @@
                 <a:solidFill>
                   <a:srgbClr val="80994F"/>
                 </a:solidFill>
-                <a:latin typeface="Karla" pitchFamily="34" charset="0"/>
-                <a:ea typeface="Karla" pitchFamily="34" charset="-122"/>
-                <a:cs typeface="Karla" pitchFamily="34" charset="-120"/>
+                <a:latin typeface="Calibri" pitchFamily="34" charset="0"/>
+                <a:ea typeface="Calibri" pitchFamily="34" charset="-122"/>
+                <a:cs typeface="Calibri" pitchFamily="34" charset="-120"/>
               </a:rPr>
               <a:t>Bulls are colourblind to red. It is the movement of the cape that gets their attention, not its colour.</a:t>
             </a:r>
@@ -6550,9 +6550,9 @@
                 <a:solidFill>
                   <a:srgbClr val="8B9179"/>
                 </a:solidFill>
-                <a:latin typeface="Libre Caslon Display" pitchFamily="34" charset="0"/>
-                <a:ea typeface="Libre Caslon Display" pitchFamily="34" charset="-122"/>
-                <a:cs typeface="Libre Caslon Display" pitchFamily="34" charset="-120"/>
+                <a:latin typeface="Georgia" pitchFamily="34" charset="0"/>
+                <a:ea typeface="Georgia" pitchFamily="34" charset="-122"/>
+                <a:cs typeface="Georgia" pitchFamily="34" charset="-120"/>
               </a:rPr>
               <a:t>The Pastoral Guide</a:t>
             </a:r>
@@ -6744,9 +6744,9 @@
                 <a:solidFill>
                   <a:srgbClr val="A7B17F"/>
                 </a:solidFill>
-                <a:latin typeface="Karla" pitchFamily="34" charset="0"/>
-                <a:ea typeface="Karla" pitchFamily="34" charset="-122"/>
-                <a:cs typeface="Karla" pitchFamily="34" charset="-120"/>
+                <a:latin typeface="Calibri" pitchFamily="34" charset="0"/>
+                <a:ea typeface="Calibri" pitchFamily="34" charset="-122"/>
+                <a:cs typeface="Calibri" pitchFamily="34" charset="-120"/>
               </a:rPr>
               <a:t>MYSTERY FACT OF THE DAY  ·  NO. 5</a:t>
             </a:r>
@@ -6824,9 +6824,9 @@
                 <a:solidFill>
                   <a:srgbClr val="80994F"/>
                 </a:solidFill>
-                <a:latin typeface="Libre Caslon Display" pitchFamily="34" charset="0"/>
-                <a:ea typeface="Libre Caslon Display" pitchFamily="34" charset="-122"/>
-                <a:cs typeface="Libre Caslon Display" pitchFamily="34" charset="-120"/>
+                <a:latin typeface="Georgia" pitchFamily="34" charset="0"/>
+                <a:ea typeface="Georgia" pitchFamily="34" charset="-122"/>
+                <a:cs typeface="Georgia" pitchFamily="34" charset="-120"/>
               </a:rPr>
               <a:t>Wombats produce cube-shaped droppings.</a:t>
             </a:r>
@@ -6863,9 +6863,9 @@
                 <a:solidFill>
                   <a:srgbClr val="919E74"/>
                 </a:solidFill>
-                <a:latin typeface="Karla" pitchFamily="34" charset="0"/>
-                <a:ea typeface="Karla" pitchFamily="34" charset="-122"/>
-                <a:cs typeface="Karla" pitchFamily="34" charset="-120"/>
+                <a:latin typeface="Calibri" pitchFamily="34" charset="0"/>
+                <a:ea typeface="Calibri" pitchFamily="34" charset="-122"/>
+                <a:cs typeface="Calibri" pitchFamily="34" charset="-120"/>
               </a:rPr>
               <a:t>True or false? Show of hands.</a:t>
             </a:r>
@@ -6928,9 +6928,9 @@
                 <a:solidFill>
                   <a:srgbClr val="FFFDF7"/>
                 </a:solidFill>
-                <a:latin typeface="Karla" pitchFamily="34" charset="0"/>
-                <a:ea typeface="Karla" pitchFamily="34" charset="-122"/>
-                <a:cs typeface="Karla" pitchFamily="34" charset="-120"/>
+                <a:latin typeface="Calibri" pitchFamily="34" charset="0"/>
+                <a:ea typeface="Calibri" pitchFamily="34" charset="-122"/>
+                <a:cs typeface="Calibri" pitchFamily="34" charset="-120"/>
               </a:rPr>
               <a:t>TRUE</a:t>
             </a:r>
@@ -6970,9 +6970,9 @@
                 <a:solidFill>
                   <a:srgbClr val="80994F"/>
                 </a:solidFill>
-                <a:latin typeface="Karla" pitchFamily="34" charset="0"/>
-                <a:ea typeface="Karla" pitchFamily="34" charset="-122"/>
-                <a:cs typeface="Karla" pitchFamily="34" charset="-120"/>
+                <a:latin typeface="Calibri" pitchFamily="34" charset="0"/>
+                <a:ea typeface="Calibri" pitchFamily="34" charset="-122"/>
+                <a:cs typeface="Calibri" pitchFamily="34" charset="-120"/>
               </a:rPr>
               <a:t>Scientists found their intestines squeeze waste into shape, leaving it with flat sides and corners.</a:t>
             </a:r>
@@ -7033,9 +7033,9 @@
                 <a:solidFill>
                   <a:srgbClr val="8B9179"/>
                 </a:solidFill>
-                <a:latin typeface="Libre Caslon Display" pitchFamily="34" charset="0"/>
-                <a:ea typeface="Libre Caslon Display" pitchFamily="34" charset="-122"/>
-                <a:cs typeface="Libre Caslon Display" pitchFamily="34" charset="-120"/>
+                <a:latin typeface="Georgia" pitchFamily="34" charset="0"/>
+                <a:ea typeface="Georgia" pitchFamily="34" charset="-122"/>
+                <a:cs typeface="Georgia" pitchFamily="34" charset="-120"/>
               </a:rPr>
               <a:t>The Pastoral Guide</a:t>
             </a:r>
@@ -7227,9 +7227,9 @@
                 <a:solidFill>
                   <a:srgbClr val="A7B17F"/>
                 </a:solidFill>
-                <a:latin typeface="Karla" pitchFamily="34" charset="0"/>
-                <a:ea typeface="Karla" pitchFamily="34" charset="-122"/>
-                <a:cs typeface="Karla" pitchFamily="34" charset="-120"/>
+                <a:latin typeface="Calibri" pitchFamily="34" charset="0"/>
+                <a:ea typeface="Calibri" pitchFamily="34" charset="-122"/>
+                <a:cs typeface="Calibri" pitchFamily="34" charset="-120"/>
               </a:rPr>
               <a:t>MYSTERY FACT OF THE DAY  ·  NO. 6</a:t>
             </a:r>
@@ -7307,9 +7307,9 @@
                 <a:solidFill>
                   <a:srgbClr val="80994F"/>
                 </a:solidFill>
-                <a:latin typeface="Libre Caslon Display" pitchFamily="34" charset="0"/>
-                <a:ea typeface="Libre Caslon Display" pitchFamily="34" charset="-122"/>
-                <a:cs typeface="Libre Caslon Display" pitchFamily="34" charset="-120"/>
+                <a:latin typeface="Georgia" pitchFamily="34" charset="0"/>
+                <a:ea typeface="Georgia" pitchFamily="34" charset="-122"/>
+                <a:cs typeface="Georgia" pitchFamily="34" charset="-120"/>
               </a:rPr>
               <a:t>Napoleon Bonaparte was unusually short.</a:t>
             </a:r>
@@ -7346,9 +7346,9 @@
                 <a:solidFill>
                   <a:srgbClr val="919E74"/>
                 </a:solidFill>
-                <a:latin typeface="Karla" pitchFamily="34" charset="0"/>
-                <a:ea typeface="Karla" pitchFamily="34" charset="-122"/>
-                <a:cs typeface="Karla" pitchFamily="34" charset="-120"/>
+                <a:latin typeface="Calibri" pitchFamily="34" charset="0"/>
+                <a:ea typeface="Calibri" pitchFamily="34" charset="-122"/>
+                <a:cs typeface="Calibri" pitchFamily="34" charset="-120"/>
               </a:rPr>
               <a:t>True or false? Show of hands.</a:t>
             </a:r>
@@ -7411,9 +7411,9 @@
                 <a:solidFill>
                   <a:srgbClr val="FFFDF7"/>
                 </a:solidFill>
-                <a:latin typeface="Karla" pitchFamily="34" charset="0"/>
-                <a:ea typeface="Karla" pitchFamily="34" charset="-122"/>
-                <a:cs typeface="Karla" pitchFamily="34" charset="-120"/>
+                <a:latin typeface="Calibri" pitchFamily="34" charset="0"/>
+                <a:ea typeface="Calibri" pitchFamily="34" charset="-122"/>
+                <a:cs typeface="Calibri" pitchFamily="34" charset="-120"/>
               </a:rPr>
               <a:t>FALSE</a:t>
             </a:r>
@@ -7453,9 +7453,9 @@
                 <a:solidFill>
                   <a:srgbClr val="80994F"/>
                 </a:solidFill>
-                <a:latin typeface="Karla" pitchFamily="34" charset="0"/>
-                <a:ea typeface="Karla" pitchFamily="34" charset="-122"/>
-                <a:cs typeface="Karla" pitchFamily="34" charset="-120"/>
+                <a:latin typeface="Calibri" pitchFamily="34" charset="0"/>
+                <a:ea typeface="Calibri" pitchFamily="34" charset="-122"/>
+                <a:cs typeface="Calibri" pitchFamily="34" charset="-120"/>
               </a:rPr>
               <a:t>At around 1.70m (5 ft 7 in), he was roughly average height for a Frenchman of his time; the myth came from old measurement mix-ups.</a:t>
             </a:r>
@@ -7516,9 +7516,9 @@
                 <a:solidFill>
                   <a:srgbClr val="8B9179"/>
                 </a:solidFill>
-                <a:latin typeface="Libre Caslon Display" pitchFamily="34" charset="0"/>
-                <a:ea typeface="Libre Caslon Display" pitchFamily="34" charset="-122"/>
-                <a:cs typeface="Libre Caslon Display" pitchFamily="34" charset="-120"/>
+                <a:latin typeface="Georgia" pitchFamily="34" charset="0"/>
+                <a:ea typeface="Georgia" pitchFamily="34" charset="-122"/>
+                <a:cs typeface="Georgia" pitchFamily="34" charset="-120"/>
               </a:rPr>
               <a:t>The Pastoral Guide</a:t>
             </a:r>
@@ -7710,9 +7710,9 @@
                 <a:solidFill>
                   <a:srgbClr val="A7B17F"/>
                 </a:solidFill>
-                <a:latin typeface="Karla" pitchFamily="34" charset="0"/>
-                <a:ea typeface="Karla" pitchFamily="34" charset="-122"/>
-                <a:cs typeface="Karla" pitchFamily="34" charset="-120"/>
+                <a:latin typeface="Calibri" pitchFamily="34" charset="0"/>
+                <a:ea typeface="Calibri" pitchFamily="34" charset="-122"/>
+                <a:cs typeface="Calibri" pitchFamily="34" charset="-120"/>
               </a:rPr>
               <a:t>MYSTERY FACT OF THE DAY  ·  NO. 7</a:t>
             </a:r>
@@ -7790,9 +7790,9 @@
                 <a:solidFill>
                   <a:srgbClr val="80994F"/>
                 </a:solidFill>
-                <a:latin typeface="Libre Caslon Display" pitchFamily="34" charset="0"/>
-                <a:ea typeface="Libre Caslon Display" pitchFamily="34" charset="-122"/>
-                <a:cs typeface="Libre Caslon Display" pitchFamily="34" charset="-120"/>
+                <a:latin typeface="Georgia" pitchFamily="34" charset="0"/>
+                <a:ea typeface="Georgia" pitchFamily="34" charset="-122"/>
+                <a:cs typeface="Georgia" pitchFamily="34" charset="-120"/>
               </a:rPr>
               <a:t>A day on Venus is longer than a year on Venus.</a:t>
             </a:r>
@@ -7829,9 +7829,9 @@
                 <a:solidFill>
                   <a:srgbClr val="919E74"/>
                 </a:solidFill>
-                <a:latin typeface="Karla" pitchFamily="34" charset="0"/>
-                <a:ea typeface="Karla" pitchFamily="34" charset="-122"/>
-                <a:cs typeface="Karla" pitchFamily="34" charset="-120"/>
+                <a:latin typeface="Calibri" pitchFamily="34" charset="0"/>
+                <a:ea typeface="Calibri" pitchFamily="34" charset="-122"/>
+                <a:cs typeface="Calibri" pitchFamily="34" charset="-120"/>
               </a:rPr>
               <a:t>True or false? Show of hands.</a:t>
             </a:r>
@@ -7894,9 +7894,9 @@
                 <a:solidFill>
                   <a:srgbClr val="FFFDF7"/>
                 </a:solidFill>
-                <a:latin typeface="Karla" pitchFamily="34" charset="0"/>
-                <a:ea typeface="Karla" pitchFamily="34" charset="-122"/>
-                <a:cs typeface="Karla" pitchFamily="34" charset="-120"/>
+                <a:latin typeface="Calibri" pitchFamily="34" charset="0"/>
+                <a:ea typeface="Calibri" pitchFamily="34" charset="-122"/>
+                <a:cs typeface="Calibri" pitchFamily="34" charset="-120"/>
               </a:rPr>
               <a:t>TRUE</a:t>
             </a:r>
@@ -7936,9 +7936,9 @@
                 <a:solidFill>
                   <a:srgbClr val="80994F"/>
                 </a:solidFill>
-                <a:latin typeface="Karla" pitchFamily="34" charset="0"/>
-                <a:ea typeface="Karla" pitchFamily="34" charset="-122"/>
-                <a:cs typeface="Karla" pitchFamily="34" charset="-120"/>
+                <a:latin typeface="Calibri" pitchFamily="34" charset="0"/>
+                <a:ea typeface="Calibri" pitchFamily="34" charset="-122"/>
+                <a:cs typeface="Calibri" pitchFamily="34" charset="-120"/>
               </a:rPr>
               <a:t>Venus spins so slowly that one day there (243 Earth days) lasts longer than its trip around the Sun (225 Earth days).</a:t>
             </a:r>
@@ -7999,9 +7999,9 @@
                 <a:solidFill>
                   <a:srgbClr val="8B9179"/>
                 </a:solidFill>
-                <a:latin typeface="Libre Caslon Display" pitchFamily="34" charset="0"/>
-                <a:ea typeface="Libre Caslon Display" pitchFamily="34" charset="-122"/>
-                <a:cs typeface="Libre Caslon Display" pitchFamily="34" charset="-120"/>
+                <a:latin typeface="Georgia" pitchFamily="34" charset="0"/>
+                <a:ea typeface="Georgia" pitchFamily="34" charset="-122"/>
+                <a:cs typeface="Georgia" pitchFamily="34" charset="-120"/>
               </a:rPr>
               <a:t>The Pastoral Guide</a:t>
             </a:r>
@@ -8193,9 +8193,9 @@
                 <a:solidFill>
                   <a:srgbClr val="A7B17F"/>
                 </a:solidFill>
-                <a:latin typeface="Karla" pitchFamily="34" charset="0"/>
-                <a:ea typeface="Karla" pitchFamily="34" charset="-122"/>
-                <a:cs typeface="Karla" pitchFamily="34" charset="-120"/>
+                <a:latin typeface="Calibri" pitchFamily="34" charset="0"/>
+                <a:ea typeface="Calibri" pitchFamily="34" charset="-122"/>
+                <a:cs typeface="Calibri" pitchFamily="34" charset="-120"/>
               </a:rPr>
               <a:t>MYSTERY FACT OF THE DAY  ·  NO. 8</a:t>
             </a:r>
@@ -8273,9 +8273,9 @@
                 <a:solidFill>
                   <a:srgbClr val="80994F"/>
                 </a:solidFill>
-                <a:latin typeface="Libre Caslon Display" pitchFamily="34" charset="0"/>
-                <a:ea typeface="Libre Caslon Display" pitchFamily="34" charset="-122"/>
-                <a:cs typeface="Libre Caslon Display" pitchFamily="34" charset="-120"/>
+                <a:latin typeface="Georgia" pitchFamily="34" charset="0"/>
+                <a:ea typeface="Georgia" pitchFamily="34" charset="-122"/>
+                <a:cs typeface="Georgia" pitchFamily="34" charset="-120"/>
               </a:rPr>
               <a:t>Chameleons mainly change colour to blend into their surroundings.</a:t>
             </a:r>
@@ -8312,9 +8312,9 @@
                 <a:solidFill>
                   <a:srgbClr val="919E74"/>
                 </a:solidFill>
-                <a:latin typeface="Karla" pitchFamily="34" charset="0"/>
-                <a:ea typeface="Karla" pitchFamily="34" charset="-122"/>
-                <a:cs typeface="Karla" pitchFamily="34" charset="-120"/>
+                <a:latin typeface="Calibri" pitchFamily="34" charset="0"/>
+                <a:ea typeface="Calibri" pitchFamily="34" charset="-122"/>
+                <a:cs typeface="Calibri" pitchFamily="34" charset="-120"/>
               </a:rPr>
               <a:t>True or false? Show of hands.</a:t>
             </a:r>
@@ -8377,9 +8377,9 @@
                 <a:solidFill>
                   <a:srgbClr val="FFFDF7"/>
                 </a:solidFill>
-                <a:latin typeface="Karla" pitchFamily="34" charset="0"/>
-                <a:ea typeface="Karla" pitchFamily="34" charset="-122"/>
-                <a:cs typeface="Karla" pitchFamily="34" charset="-120"/>
+                <a:latin typeface="Calibri" pitchFamily="34" charset="0"/>
+                <a:ea typeface="Calibri" pitchFamily="34" charset="-122"/>
+                <a:cs typeface="Calibri" pitchFamily="34" charset="-120"/>
               </a:rPr>
               <a:t>FALSE</a:t>
             </a:r>
@@ -8419,9 +8419,9 @@
                 <a:solidFill>
                   <a:srgbClr val="80994F"/>
                 </a:solidFill>
-                <a:latin typeface="Karla" pitchFamily="34" charset="0"/>
-                <a:ea typeface="Karla" pitchFamily="34" charset="-122"/>
-                <a:cs typeface="Karla" pitchFamily="34" charset="-120"/>
+                <a:latin typeface="Calibri" pitchFamily="34" charset="0"/>
+                <a:ea typeface="Calibri" pitchFamily="34" charset="-122"/>
+                <a:cs typeface="Calibri" pitchFamily="34" charset="-120"/>
               </a:rPr>
               <a:t>They mostly change colour to communicate with other chameleons and to control their body temperature.</a:t>
             </a:r>
@@ -8482,9 +8482,9 @@
                 <a:solidFill>
                   <a:srgbClr val="8B9179"/>
                 </a:solidFill>
-                <a:latin typeface="Libre Caslon Display" pitchFamily="34" charset="0"/>
-                <a:ea typeface="Libre Caslon Display" pitchFamily="34" charset="-122"/>
-                <a:cs typeface="Libre Caslon Display" pitchFamily="34" charset="-120"/>
+                <a:latin typeface="Georgia" pitchFamily="34" charset="0"/>
+                <a:ea typeface="Georgia" pitchFamily="34" charset="-122"/>
+                <a:cs typeface="Georgia" pitchFamily="34" charset="-120"/>
               </a:rPr>
               <a:t>The Pastoral Guide</a:t>
             </a:r>
